--- a/Prezentacija.pptx
+++ b/Prezentacija.pptx
@@ -127,6 +127,11 @@
       </a:defRPr>
     </a:lvl9pPr>
   </p:defaultTextStyle>
+  <p:extLst>
+    <p:ext uri="{EFAFB233-063F-42B5-8137-9DF3F51BA10A}">
+      <p15:sldGuideLst xmlns:p15="http://schemas.microsoft.com/office/powerpoint/2012/main"/>
+    </p:ext>
+  </p:extLst>
 </p:presentation>
 </file>
 
@@ -20819,7 +20824,43 @@
                 </a:solidFill>
                 <a:latin typeface="Arial Black" panose="020B0A04020102020204" pitchFamily="34" charset="0"/>
               </a:rPr>
-              <a:t>Topic</a:t>
+              <a:t>Topic (</a:t>
+            </a:r>
+            <a:r>
+              <a:rPr lang="en-US" sz="3000" dirty="0" err="1">
+                <a:solidFill>
+                  <a:schemeClr val="bg1"/>
+                </a:solidFill>
+                <a:latin typeface="Arial Black" panose="020B0A04020102020204" pitchFamily="34" charset="0"/>
+              </a:rPr>
+              <a:t>kuca</a:t>
+            </a:r>
+            <a:r>
+              <a:rPr lang="en-US" sz="3000" dirty="0">
+                <a:solidFill>
+                  <a:schemeClr val="bg1"/>
+                </a:solidFill>
+                <a:latin typeface="Arial Black" panose="020B0A04020102020204" pitchFamily="34" charset="0"/>
+              </a:rPr>
+              <a:t>/soba/</a:t>
+            </a:r>
+            <a:r>
+              <a:rPr lang="en-US" sz="3000" dirty="0" err="1">
+                <a:solidFill>
+                  <a:schemeClr val="bg1"/>
+                </a:solidFill>
+                <a:latin typeface="Arial Black" panose="020B0A04020102020204" pitchFamily="34" charset="0"/>
+              </a:rPr>
+              <a:t>temperatura</a:t>
+            </a:r>
+            <a:r>
+              <a:rPr lang="en-US" sz="3000" dirty="0">
+                <a:solidFill>
+                  <a:schemeClr val="bg1"/>
+                </a:solidFill>
+                <a:latin typeface="Arial Black" panose="020B0A04020102020204" pitchFamily="34" charset="0"/>
+              </a:rPr>
+              <a:t>)</a:t>
             </a:r>
           </a:p>
           <a:p>
@@ -20837,7 +20878,61 @@
                 </a:solidFill>
                 <a:latin typeface="Arial Black" panose="020B0A04020102020204" pitchFamily="34" charset="0"/>
               </a:rPr>
-              <a:t>Wildcard</a:t>
+              <a:t>Wildcard (</a:t>
+            </a:r>
+            <a:r>
+              <a:rPr lang="en-US" sz="3000" dirty="0" err="1">
+                <a:solidFill>
+                  <a:schemeClr val="bg1"/>
+                </a:solidFill>
+                <a:latin typeface="Arial Black" panose="020B0A04020102020204" pitchFamily="34" charset="0"/>
+              </a:rPr>
+              <a:t>kuca</a:t>
+            </a:r>
+            <a:r>
+              <a:rPr lang="en-US" sz="3000" dirty="0">
+                <a:solidFill>
+                  <a:schemeClr val="bg1"/>
+                </a:solidFill>
+                <a:latin typeface="Arial Black" panose="020B0A04020102020204" pitchFamily="34" charset="0"/>
+              </a:rPr>
+              <a:t>/+/test </a:t>
+            </a:r>
+            <a:r>
+              <a:rPr lang="en-US" sz="3000" dirty="0" err="1">
+                <a:solidFill>
+                  <a:schemeClr val="bg1"/>
+                </a:solidFill>
+                <a:latin typeface="Arial Black" panose="020B0A04020102020204" pitchFamily="34" charset="0"/>
+              </a:rPr>
+              <a:t>ili</a:t>
+            </a:r>
+            <a:r>
+              <a:rPr lang="en-US" sz="3000" dirty="0">
+                <a:solidFill>
+                  <a:schemeClr val="bg1"/>
+                </a:solidFill>
+                <a:latin typeface="Arial Black" panose="020B0A04020102020204" pitchFamily="34" charset="0"/>
+              </a:rPr>
+              <a:t> </a:t>
+            </a:r>
+            <a:r>
+              <a:rPr lang="en-US" sz="3000" dirty="0" err="1">
+                <a:solidFill>
+                  <a:schemeClr val="bg1"/>
+                </a:solidFill>
+                <a:latin typeface="Arial Black" panose="020B0A04020102020204" pitchFamily="34" charset="0"/>
+              </a:rPr>
+              <a:t>kuca</a:t>
+            </a:r>
+            <a:r>
+              <a:rPr lang="en-US" sz="3000" dirty="0">
+                <a:solidFill>
+                  <a:schemeClr val="bg1"/>
+                </a:solidFill>
+                <a:latin typeface="Arial Black" panose="020B0A04020102020204" pitchFamily="34" charset="0"/>
+              </a:rPr>
+              <a:t>/#)</a:t>
             </a:r>
           </a:p>
           <a:p>
@@ -20855,7 +20950,7 @@
                 </a:solidFill>
                 <a:latin typeface="Arial Black" panose="020B0A04020102020204" pitchFamily="34" charset="0"/>
               </a:rPr>
-              <a:t>QoS</a:t>
+              <a:t>QoS </a:t>
             </a:r>
           </a:p>
           <a:p>
